--- a/VulnShield_Spectra26.pptx
+++ b/VulnShield_Spectra26.pptx
@@ -15,6 +15,8 @@
     <p:sldId id="263" r:id="rId15"/>
     <p:sldId id="264" r:id="rId16"/>
     <p:sldId id="265" r:id="rId17"/>
+    <p:sldId id="266" r:id="rId18"/>
+    <p:sldId id="267" r:id="rId19"/>
   </p:sldIdLst>
   <p:sldSz cx="12191695" cy="6858000" type="screen4x3"/>
   <p:notesSz cx="6858000" cy="9144000"/>
@@ -581,6 +583,146 @@
           <a:lstStyle/>
           <a:p>
             <a:r>
+              <a:t>Finally, all of this data is useless if managers can't read it. So, I integrated an automated PDF generator that aggregates the Web Scan, Device Audit, and Threat Intel results into one professional executive report, ready to be handed to a CEO or compliance officer.</a:t>
+            </a:r>
+          </a:p>
+        </p:txBody>
+      </p:sp>
+      <p:sp>
+        <p:nvSpPr>
+          <p:cNvPr id="4" name="Slide Number Placeholder 3"/>
+          <p:cNvSpPr>
+            <a:spLocks noGrp="1"/>
+          </p:cNvSpPr>
+          <p:nvPr>
+            <p:ph type="sldNum" idx="5" sz="quarter"/>
+          </p:nvPr>
+        </p:nvSpPr>
+        <p:spPr/>
+      </p:sp>
+    </p:spTree>
+  </p:cSld>
+  <p:clrMapOvr>
+    <a:masterClrMapping/>
+  </p:clrMapOvr>
+</p:notes>
+</file>
+
+<file path=ppt/notesSlides/notesSlide11.xml><?xml version="1.0" encoding="utf-8"?>
+<p:notes xmlns:a="http://schemas.openxmlformats.org/drawingml/2006/main" xmlns:p="http://schemas.openxmlformats.org/presentationml/2006/main" xmlns:r="http://schemas.openxmlformats.org/officeDocument/2006/relationships">
+  <p:cSld>
+    <p:spTree>
+      <p:nvGrpSpPr>
+        <p:cNvPr id="1" name=""/>
+        <p:cNvGrpSpPr/>
+        <p:nvPr/>
+      </p:nvGrpSpPr>
+      <p:grpSpPr>
+        <a:xfrm>
+          <a:off x="0" y="0"/>
+          <a:ext cx="0" cy="0"/>
+          <a:chOff x="0" y="0"/>
+          <a:chExt cx="0" cy="0"/>
+        </a:xfrm>
+      </p:grpSpPr>
+      <p:sp>
+        <p:nvSpPr>
+          <p:cNvPr id="2" name="Slide Image Placeholder 1"/>
+          <p:cNvSpPr>
+            <a:spLocks noGrp="1"/>
+          </p:cNvSpPr>
+          <p:nvPr>
+            <p:ph type="sldImg" idx="2"/>
+          </p:nvPr>
+        </p:nvSpPr>
+        <p:spPr/>
+      </p:sp>
+      <p:sp>
+        <p:nvSpPr>
+          <p:cNvPr id="3" name="Notes Placeholder 2"/>
+          <p:cNvSpPr>
+            <a:spLocks noGrp="1"/>
+          </p:cNvSpPr>
+          <p:nvPr>
+            <p:ph type="body" idx="3" sz="quarter"/>
+          </p:nvPr>
+        </p:nvSpPr>
+        <p:spPr/>
+        <p:txBody>
+          <a:bodyPr/>
+          <a:lstStyle/>
+          <a:p>
+            <a:r>
+              <a:t>For the future scope, I plan to integrate Generative AI. Currently, Vuln-Shield finds the bugs. With an AI integration, Vuln-Shield will actually write the secure code needed to patch the server automatically.</a:t>
+            </a:r>
+          </a:p>
+        </p:txBody>
+      </p:sp>
+      <p:sp>
+        <p:nvSpPr>
+          <p:cNvPr id="4" name="Slide Number Placeholder 3"/>
+          <p:cNvSpPr>
+            <a:spLocks noGrp="1"/>
+          </p:cNvSpPr>
+          <p:nvPr>
+            <p:ph type="sldNum" idx="5" sz="quarter"/>
+          </p:nvPr>
+        </p:nvSpPr>
+        <p:spPr/>
+      </p:sp>
+    </p:spTree>
+  </p:cSld>
+  <p:clrMapOvr>
+    <a:masterClrMapping/>
+  </p:clrMapOvr>
+</p:notes>
+</file>
+
+<file path=ppt/notesSlides/notesSlide12.xml><?xml version="1.0" encoding="utf-8"?>
+<p:notes xmlns:a="http://schemas.openxmlformats.org/drawingml/2006/main" xmlns:p="http://schemas.openxmlformats.org/presentationml/2006/main" xmlns:r="http://schemas.openxmlformats.org/officeDocument/2006/relationships">
+  <p:cSld>
+    <p:spTree>
+      <p:nvGrpSpPr>
+        <p:cNvPr id="1" name=""/>
+        <p:cNvGrpSpPr/>
+        <p:nvPr/>
+      </p:nvGrpSpPr>
+      <p:grpSpPr>
+        <a:xfrm>
+          <a:off x="0" y="0"/>
+          <a:ext cx="0" cy="0"/>
+          <a:chOff x="0" y="0"/>
+          <a:chExt cx="0" cy="0"/>
+        </a:xfrm>
+      </p:grpSpPr>
+      <p:sp>
+        <p:nvSpPr>
+          <p:cNvPr id="2" name="Slide Image Placeholder 1"/>
+          <p:cNvSpPr>
+            <a:spLocks noGrp="1"/>
+          </p:cNvSpPr>
+          <p:nvPr>
+            <p:ph type="sldImg" idx="2"/>
+          </p:nvPr>
+        </p:nvSpPr>
+        <p:spPr/>
+      </p:sp>
+      <p:sp>
+        <p:nvSpPr>
+          <p:cNvPr id="3" name="Notes Placeholder 2"/>
+          <p:cNvSpPr>
+            <a:spLocks noGrp="1"/>
+          </p:cNvSpPr>
+          <p:nvPr>
+            <p:ph type="body" idx="3" sz="quarter"/>
+          </p:nvPr>
+        </p:nvSpPr>
+        <p:spPr/>
+        <p:txBody>
+          <a:bodyPr/>
+          <a:lstStyle/>
+          <a:p>
+            <a:r>
               <a:t>In conclusion, Vuln-Shield proves that comprehensive cybersecurity doesn't have to be expensive or overly complicated. By unifying Web, Device, and Dark Web auditing, we create a stronger, faster defense. Thank you for your time, I am now open to any questions.</a:t>
             </a:r>
           </a:p>
@@ -1071,7 +1213,7 @@
           <a:lstStyle/>
           <a:p>
             <a:r>
-              <a:t>Finally, all of this data is useless if managers can't read it. So, I integrated an automated PDF generator that aggregates the Web Scan, Device Audit, and Threat Intel results into one professional executive report, ready to be handed to a CEO or compliance officer.</a:t>
+              <a:t>Our newest module is the Laptop and Mobile Spyware Scanner. Using advanced browser APIs, it detects if a device is being actively hacked or tracked. It flags unencrypted traffic and rogue hardware access, stopping spyware from exfiltrating sensitive data.</a:t>
             </a:r>
           </a:p>
         </p:txBody>
@@ -1141,7 +1283,7 @@
           <a:lstStyle/>
           <a:p>
             <a:r>
-              <a:t>For the future scope, I plan to integrate Generative AI. Currently, Vuln-Shield finds the bugs. With an AI integration, Vuln-Shield will actually write the secure code needed to patch the server automatically.</a:t>
+              <a:t>Finally, to show this in action, we built a Live AI Attack and Defense Simulator. It simulates real-world hacks like SQL Injections. The moment an attack happens, our system generates and applies a secure code patch in seconds, turning Vuln-Shield from a monitoring tool into an active defense system.</a:t>
             </a:r>
           </a:p>
         </p:txBody>
@@ -4279,6 +4421,218 @@
                 </a:solidFill>
                 <a:latin typeface="Arial"/>
               </a:rPr>
+              <a:t>Automated PDF Executive Reporting</a:t>
+            </a:r>
+          </a:p>
+        </p:txBody>
+      </p:sp>
+      <p:sp>
+        <p:nvSpPr>
+          <p:cNvPr id="3" name="Content Placeholder 2"/>
+          <p:cNvSpPr>
+            <a:spLocks noGrp="1"/>
+          </p:cNvSpPr>
+          <p:nvPr>
+            <p:ph idx="1"/>
+          </p:nvPr>
+        </p:nvSpPr>
+        <p:spPr/>
+        <p:txBody>
+          <a:bodyPr/>
+          <a:lstStyle/>
+          <a:p/>
+          <a:p>
+            <a:pPr/>
+            <a:r>
+              <a:rPr sz="2800" b="0">
+                <a:solidFill>
+                  <a:srgbClr val="CCD6F6"/>
+                </a:solidFill>
+                <a:latin typeface="Arial"/>
+              </a:rPr>
+              <a:t>Aggregates data from all three scan vectors.</a:t>
+            </a:r>
+          </a:p>
+          <a:p>
+            <a:pPr/>
+            <a:r>
+              <a:rPr sz="2800" b="0">
+                <a:solidFill>
+                  <a:srgbClr val="CCD6F6"/>
+                </a:solidFill>
+                <a:latin typeface="Arial"/>
+              </a:rPr>
+              <a:t>Utilizes jspdf and jspdf-autotable libraries.</a:t>
+            </a:r>
+          </a:p>
+          <a:p>
+            <a:pPr/>
+            <a:r>
+              <a:rPr sz="2800" b="0">
+                <a:solidFill>
+                  <a:srgbClr val="CCD6F6"/>
+                </a:solidFill>
+                <a:latin typeface="Arial"/>
+              </a:rPr>
+              <a:t>Generates a professional, exportable compliance document.</a:t>
+            </a:r>
+          </a:p>
+          <a:p>
+            <a:pPr/>
+            <a:r>
+              <a:rPr sz="2800" b="0">
+                <a:solidFill>
+                  <a:srgbClr val="CCD6F6"/>
+                </a:solidFill>
+                <a:latin typeface="Arial"/>
+              </a:rPr>
+              <a:t>Translates raw technical JSON data into readable formats for C-Level executives.</a:t>
+            </a:r>
+          </a:p>
+        </p:txBody>
+      </p:sp>
+    </p:spTree>
+  </p:cSld>
+  <p:clrMapOvr>
+    <a:masterClrMapping/>
+  </p:clrMapOvr>
+</p:sld>
+</file>
+
+<file path=ppt/slides/slide11.xml><?xml version="1.0" encoding="utf-8"?>
+<p:sld xmlns:a="http://schemas.openxmlformats.org/drawingml/2006/main" xmlns:p="http://schemas.openxmlformats.org/presentationml/2006/main" xmlns:r="http://schemas.openxmlformats.org/officeDocument/2006/relationships">
+  <p:cSld>
+    <p:bg>
+      <p:bgPr>
+        <a:solidFill>
+          <a:srgbClr val="0A192F"/>
+        </a:solidFill>
+        <a:effectLst/>
+      </p:bgPr>
+    </p:bg>
+    <p:spTree>
+      <p:nvGrpSpPr>
+        <p:cNvPr id="1" name=""/>
+        <p:cNvGrpSpPr/>
+        <p:nvPr/>
+      </p:nvGrpSpPr>
+      <p:grpSpPr/>
+      <p:sp>
+        <p:nvSpPr>
+          <p:cNvPr id="2" name="Title 1"/>
+          <p:cNvSpPr>
+            <a:spLocks noGrp="1"/>
+          </p:cNvSpPr>
+          <p:nvPr>
+            <p:ph type="title"/>
+          </p:nvPr>
+        </p:nvSpPr>
+        <p:spPr/>
+        <p:txBody>
+          <a:bodyPr/>
+          <a:lstStyle/>
+          <a:p>
+            <a:r>
+              <a:rPr sz="4400" b="1">
+                <a:solidFill>
+                  <a:srgbClr val="0AFF89"/>
+                </a:solidFill>
+                <a:latin typeface="Arial"/>
+              </a:rPr>
+              <a:t>Future Scope: The Road Ahead</a:t>
+            </a:r>
+          </a:p>
+        </p:txBody>
+      </p:sp>
+      <p:sp>
+        <p:nvSpPr>
+          <p:cNvPr id="3" name="Content Placeholder 2"/>
+          <p:cNvSpPr>
+            <a:spLocks noGrp="1"/>
+          </p:cNvSpPr>
+          <p:nvPr>
+            <p:ph idx="1"/>
+          </p:nvPr>
+        </p:nvSpPr>
+        <p:spPr/>
+        <p:txBody>
+          <a:bodyPr/>
+          <a:lstStyle/>
+          <a:p/>
+          <a:p>
+            <a:pPr/>
+            <a:r>
+              <a:rPr sz="2800" b="0">
+                <a:solidFill>
+                  <a:srgbClr val="CCD6F6"/>
+                </a:solidFill>
+                <a:latin typeface="Arial"/>
+              </a:rPr>
+              <a:t>AI Auto-Fix: Integrating LLMs to automatically write the patch to fix vulnerable code.</a:t>
+            </a:r>
+          </a:p>
+          <a:p>
+            <a:pPr/>
+            <a:r>
+              <a:rPr sz="2800" b="0">
+                <a:solidFill>
+                  <a:srgbClr val="CCD6F6"/>
+                </a:solidFill>
+                <a:latin typeface="Arial"/>
+              </a:rPr>
+              <a:t>Automated Scheduling: Setting up Cron jobs to run Vuln-Shield audits every midnight automatically.</a:t>
+            </a:r>
+          </a:p>
+        </p:txBody>
+      </p:sp>
+    </p:spTree>
+  </p:cSld>
+  <p:clrMapOvr>
+    <a:masterClrMapping/>
+  </p:clrMapOvr>
+</p:sld>
+</file>
+
+<file path=ppt/slides/slide12.xml><?xml version="1.0" encoding="utf-8"?>
+<p:sld xmlns:a="http://schemas.openxmlformats.org/drawingml/2006/main" xmlns:p="http://schemas.openxmlformats.org/presentationml/2006/main" xmlns:r="http://schemas.openxmlformats.org/officeDocument/2006/relationships">
+  <p:cSld>
+    <p:bg>
+      <p:bgPr>
+        <a:solidFill>
+          <a:srgbClr val="0A192F"/>
+        </a:solidFill>
+        <a:effectLst/>
+      </p:bgPr>
+    </p:bg>
+    <p:spTree>
+      <p:nvGrpSpPr>
+        <p:cNvPr id="1" name=""/>
+        <p:cNvGrpSpPr/>
+        <p:nvPr/>
+      </p:nvGrpSpPr>
+      <p:grpSpPr/>
+      <p:sp>
+        <p:nvSpPr>
+          <p:cNvPr id="2" name="Title 1"/>
+          <p:cNvSpPr>
+            <a:spLocks noGrp="1"/>
+          </p:cNvSpPr>
+          <p:nvPr>
+            <p:ph type="title"/>
+          </p:nvPr>
+        </p:nvSpPr>
+        <p:spPr/>
+        <p:txBody>
+          <a:bodyPr/>
+          <a:lstStyle/>
+          <a:p>
+            <a:r>
+              <a:rPr sz="4400" b="1">
+                <a:solidFill>
+                  <a:srgbClr val="0AFF89"/>
+                </a:solidFill>
+                <a:latin typeface="Arial"/>
+              </a:rPr>
               <a:t>Conclusion</a:t>
             </a:r>
           </a:p>
@@ -5105,7 +5459,7 @@
                 </a:solidFill>
                 <a:latin typeface="Arial"/>
               </a:rPr>
-              <a:t>Automated PDF Executive Reporting</a:t>
+              <a:t>Methodology 4: Laptop &amp; Mobile Spyware Scanner</a:t>
             </a:r>
           </a:p>
         </p:txBody>
@@ -5134,7 +5488,7 @@
                 </a:solidFill>
                 <a:latin typeface="Arial"/>
               </a:rPr>
-              <a:t>Aggregates data from all three scan vectors.</a:t>
+              <a:t>Universal browser-based forensics engine detecting active spyware.</a:t>
             </a:r>
           </a:p>
           <a:p>
@@ -5146,7 +5500,7 @@
                 </a:solidFill>
                 <a:latin typeface="Arial"/>
               </a:rPr>
-              <a:t>Utilizes jspdf and jspdf-autotable libraries.</a:t>
+              <a:t>Analyzes WebRTC, MediaDevices, and network data for rogue tracking.</a:t>
             </a:r>
           </a:p>
           <a:p>
@@ -5158,7 +5512,7 @@
                 </a:solidFill>
                 <a:latin typeface="Arial"/>
               </a:rPr>
-              <a:t>Generates a professional, exportable compliance document.</a:t>
+              <a:t>Identifies unencrypted HTTP traffic and missing Do-Not-Track headers.</a:t>
             </a:r>
           </a:p>
           <a:p>
@@ -5170,7 +5524,7 @@
                 </a:solidFill>
                 <a:latin typeface="Arial"/>
               </a:rPr>
-              <a:t>Translates raw technical JSON data into readable formats for C-Level executives.</a:t>
+              <a:t>Instantly alerts users to device compromise or active hacking.</a:t>
             </a:r>
           </a:p>
         </p:txBody>
@@ -5223,7 +5577,7 @@
                 </a:solidFill>
                 <a:latin typeface="Arial"/>
               </a:rPr>
-              <a:t>Future Scope: The Road Ahead</a:t>
+              <a:t>Live AI Attack &amp; Defense Simulator</a:t>
             </a:r>
           </a:p>
         </p:txBody>
@@ -5252,7 +5606,7 @@
                 </a:solidFill>
                 <a:latin typeface="Arial"/>
               </a:rPr>
-              <a:t>AI Auto-Fix: Integrating LLMs to automatically write the patch to fix vulnerable code.</a:t>
+              <a:t>Interactive exploit lab demonstrating real-time attack vs AI defense.</a:t>
             </a:r>
           </a:p>
           <a:p>
@@ -5264,7 +5618,31 @@
                 </a:solidFill>
                 <a:latin typeface="Arial"/>
               </a:rPr>
-              <a:t>Automated Scheduling: Setting up Cron jobs to run Vuln-Shield audits every midnight automatically.</a:t>
+              <a:t>Showcases 4 scenarios: SQL Injection, AWS Secrets, Stored XSS, Android Backdoor.</a:t>
+            </a:r>
+          </a:p>
+          <a:p>
+            <a:pPr/>
+            <a:r>
+              <a:rPr sz="2800" b="0">
+                <a:solidFill>
+                  <a:srgbClr val="CCD6F6"/>
+                </a:solidFill>
+                <a:latin typeface="Arial"/>
+              </a:rPr>
+              <a:t>Executes simulated attacks and immediately deploys AI-generated code patches.</a:t>
+            </a:r>
+          </a:p>
+          <a:p>
+            <a:pPr/>
+            <a:r>
+              <a:rPr sz="2800" b="0">
+                <a:solidFill>
+                  <a:srgbClr val="CCD6F6"/>
+                </a:solidFill>
+                <a:latin typeface="Arial"/>
+              </a:rPr>
+              <a:t>Reduces time-to-fix (TTF) from hours to seconds.</a:t>
             </a:r>
           </a:p>
         </p:txBody>
